--- a/Novosibirsk_State_University/Английский язык/7 семестр/Homework/Scientists role in society.pptx
+++ b/Novosibirsk_State_University/Английский язык/7 семестр/Homework/Scientists role in society.pptx
@@ -6,11 +6,13 @@
   </p:sldMasterIdLst>
   <p:sldIdLst>
     <p:sldId id="256" r:id="rId2"/>
-    <p:sldId id="257" r:id="rId3"/>
-    <p:sldId id="258" r:id="rId4"/>
-    <p:sldId id="259" r:id="rId5"/>
-    <p:sldId id="260" r:id="rId6"/>
-    <p:sldId id="261" r:id="rId7"/>
+    <p:sldId id="263" r:id="rId3"/>
+    <p:sldId id="257" r:id="rId4"/>
+    <p:sldId id="258" r:id="rId5"/>
+    <p:sldId id="259" r:id="rId6"/>
+    <p:sldId id="260" r:id="rId7"/>
+    <p:sldId id="264" r:id="rId8"/>
+    <p:sldId id="261" r:id="rId9"/>
   </p:sldIdLst>
   <p:sldSz cx="12192000" cy="6858000"/>
   <p:notesSz cx="6858000" cy="9144000"/>
@@ -109,6 +111,11 @@
       </a:defRPr>
     </a:lvl9pPr>
   </p:defaultTextStyle>
+  <p:extLst>
+    <p:ext uri="{EFAFB233-063F-42B5-8137-9DF3F51BA10A}">
+      <p15:sldGuideLst xmlns:p15="http://schemas.microsoft.com/office/powerpoint/2012/main"/>
+    </p:ext>
+  </p:extLst>
 </p:presentation>
 </file>
 
@@ -259,7 +266,7 @@
           <a:p>
             <a:fld id="{E8964C5B-A5E9-44B5-A532-59FAEF801C7A}" type="datetimeFigureOut">
               <a:rPr lang="ru-RU" smtClean="0"/>
-              <a:t>29.11.2025</a:t>
+              <a:t>19.12.2025</a:t>
             </a:fld>
             <a:endParaRPr lang="ru-RU"/>
           </a:p>
@@ -457,7 +464,7 @@
           <a:p>
             <a:fld id="{E8964C5B-A5E9-44B5-A532-59FAEF801C7A}" type="datetimeFigureOut">
               <a:rPr lang="ru-RU" smtClean="0"/>
-              <a:t>29.11.2025</a:t>
+              <a:t>19.12.2025</a:t>
             </a:fld>
             <a:endParaRPr lang="ru-RU"/>
           </a:p>
@@ -665,7 +672,7 @@
           <a:p>
             <a:fld id="{E8964C5B-A5E9-44B5-A532-59FAEF801C7A}" type="datetimeFigureOut">
               <a:rPr lang="ru-RU" smtClean="0"/>
-              <a:t>29.11.2025</a:t>
+              <a:t>19.12.2025</a:t>
             </a:fld>
             <a:endParaRPr lang="ru-RU"/>
           </a:p>
@@ -863,7 +870,7 @@
           <a:p>
             <a:fld id="{E8964C5B-A5E9-44B5-A532-59FAEF801C7A}" type="datetimeFigureOut">
               <a:rPr lang="ru-RU" smtClean="0"/>
-              <a:t>29.11.2025</a:t>
+              <a:t>19.12.2025</a:t>
             </a:fld>
             <a:endParaRPr lang="ru-RU"/>
           </a:p>
@@ -1138,7 +1145,7 @@
           <a:p>
             <a:fld id="{E8964C5B-A5E9-44B5-A532-59FAEF801C7A}" type="datetimeFigureOut">
               <a:rPr lang="ru-RU" smtClean="0"/>
-              <a:t>29.11.2025</a:t>
+              <a:t>19.12.2025</a:t>
             </a:fld>
             <a:endParaRPr lang="ru-RU"/>
           </a:p>
@@ -1403,7 +1410,7 @@
           <a:p>
             <a:fld id="{E8964C5B-A5E9-44B5-A532-59FAEF801C7A}" type="datetimeFigureOut">
               <a:rPr lang="ru-RU" smtClean="0"/>
-              <a:t>29.11.2025</a:t>
+              <a:t>19.12.2025</a:t>
             </a:fld>
             <a:endParaRPr lang="ru-RU"/>
           </a:p>
@@ -1815,7 +1822,7 @@
           <a:p>
             <a:fld id="{E8964C5B-A5E9-44B5-A532-59FAEF801C7A}" type="datetimeFigureOut">
               <a:rPr lang="ru-RU" smtClean="0"/>
-              <a:t>29.11.2025</a:t>
+              <a:t>19.12.2025</a:t>
             </a:fld>
             <a:endParaRPr lang="ru-RU"/>
           </a:p>
@@ -1956,7 +1963,7 @@
           <a:p>
             <a:fld id="{E8964C5B-A5E9-44B5-A532-59FAEF801C7A}" type="datetimeFigureOut">
               <a:rPr lang="ru-RU" smtClean="0"/>
-              <a:t>29.11.2025</a:t>
+              <a:t>19.12.2025</a:t>
             </a:fld>
             <a:endParaRPr lang="ru-RU"/>
           </a:p>
@@ -2069,7 +2076,7 @@
           <a:p>
             <a:fld id="{E8964C5B-A5E9-44B5-A532-59FAEF801C7A}" type="datetimeFigureOut">
               <a:rPr lang="ru-RU" smtClean="0"/>
-              <a:t>29.11.2025</a:t>
+              <a:t>19.12.2025</a:t>
             </a:fld>
             <a:endParaRPr lang="ru-RU"/>
           </a:p>
@@ -2380,7 +2387,7 @@
           <a:p>
             <a:fld id="{E8964C5B-A5E9-44B5-A532-59FAEF801C7A}" type="datetimeFigureOut">
               <a:rPr lang="ru-RU" smtClean="0"/>
-              <a:t>29.11.2025</a:t>
+              <a:t>19.12.2025</a:t>
             </a:fld>
             <a:endParaRPr lang="ru-RU"/>
           </a:p>
@@ -2668,7 +2675,7 @@
           <a:p>
             <a:fld id="{E8964C5B-A5E9-44B5-A532-59FAEF801C7A}" type="datetimeFigureOut">
               <a:rPr lang="ru-RU" smtClean="0"/>
-              <a:t>29.11.2025</a:t>
+              <a:t>19.12.2025</a:t>
             </a:fld>
             <a:endParaRPr lang="ru-RU"/>
           </a:p>
@@ -2909,7 +2916,7 @@
           <a:p>
             <a:fld id="{E8964C5B-A5E9-44B5-A532-59FAEF801C7A}" type="datetimeFigureOut">
               <a:rPr lang="ru-RU" smtClean="0"/>
-              <a:t>29.11.2025</a:t>
+              <a:t>19.12.2025</a:t>
             </a:fld>
             <a:endParaRPr lang="ru-RU"/>
           </a:p>
@@ -3470,6 +3477,175 @@
                 <a:latin typeface="Times New Roman" panose="02020603050405020304" pitchFamily="18" charset="0"/>
                 <a:cs typeface="Times New Roman" panose="02020603050405020304" pitchFamily="18" charset="0"/>
               </a:rPr>
+              <a:t>Presentation plan</a:t>
+            </a:r>
+            <a:endParaRPr lang="ru-RU" dirty="0">
+              <a:latin typeface="Times New Roman" panose="02020603050405020304" pitchFamily="18" charset="0"/>
+              <a:cs typeface="Times New Roman" panose="02020603050405020304" pitchFamily="18" charset="0"/>
+            </a:endParaRPr>
+          </a:p>
+        </p:txBody>
+      </p:sp>
+      <p:sp>
+        <p:nvSpPr>
+          <p:cNvPr id="6" name="Объект 2">
+            <a:extLst>
+              <a:ext uri="{FF2B5EF4-FFF2-40B4-BE49-F238E27FC236}">
+                <a16:creationId xmlns:a16="http://schemas.microsoft.com/office/drawing/2014/main" id="{D1A9D123-388E-4DB5-A492-E983978CA4C7}"/>
+              </a:ext>
+            </a:extLst>
+          </p:cNvPr>
+          <p:cNvSpPr>
+            <a:spLocks noGrp="1"/>
+          </p:cNvSpPr>
+          <p:nvPr>
+            <p:ph idx="1"/>
+          </p:nvPr>
+        </p:nvSpPr>
+        <p:spPr>
+          <a:xfrm>
+            <a:off x="3603812" y="2017058"/>
+            <a:ext cx="4984376" cy="4168869"/>
+          </a:xfrm>
+        </p:spPr>
+        <p:txBody>
+          <a:bodyPr>
+            <a:normAutofit/>
+          </a:bodyPr>
+          <a:lstStyle/>
+          <a:p>
+            <a:pPr>
+              <a:lnSpc>
+                <a:spcPct val="120000"/>
+              </a:lnSpc>
+            </a:pPr>
+            <a:r>
+              <a:rPr lang="en-US" dirty="0">
+                <a:latin typeface="Times New Roman" panose="02020603050405020304" pitchFamily="18" charset="0"/>
+                <a:cs typeface="Times New Roman" panose="02020603050405020304" pitchFamily="18" charset="0"/>
+              </a:rPr>
+              <a:t>Who are scientists and what do they do?</a:t>
+            </a:r>
+          </a:p>
+          <a:p>
+            <a:pPr>
+              <a:lnSpc>
+                <a:spcPct val="120000"/>
+              </a:lnSpc>
+            </a:pPr>
+            <a:r>
+              <a:rPr lang="en-US" dirty="0">
+                <a:latin typeface="Times New Roman" panose="02020603050405020304" pitchFamily="18" charset="0"/>
+                <a:cs typeface="Times New Roman" panose="02020603050405020304" pitchFamily="18" charset="0"/>
+              </a:rPr>
+              <a:t>The key features of scientists</a:t>
+            </a:r>
+          </a:p>
+          <a:p>
+            <a:pPr>
+              <a:lnSpc>
+                <a:spcPct val="120000"/>
+              </a:lnSpc>
+            </a:pPr>
+            <a:r>
+              <a:rPr lang="en-US" sz="2800" dirty="0">
+                <a:latin typeface="Times New Roman" panose="02020603050405020304" pitchFamily="18" charset="0"/>
+                <a:cs typeface="Times New Roman" panose="02020603050405020304" pitchFamily="18" charset="0"/>
+              </a:rPr>
+              <a:t>Types of scientists</a:t>
+            </a:r>
+          </a:p>
+          <a:p>
+            <a:pPr>
+              <a:lnSpc>
+                <a:spcPct val="120000"/>
+              </a:lnSpc>
+            </a:pPr>
+            <a:r>
+              <a:rPr lang="en-US" sz="2800" dirty="0">
+                <a:latin typeface="Times New Roman" panose="02020603050405020304" pitchFamily="18" charset="0"/>
+                <a:cs typeface="Times New Roman" panose="02020603050405020304" pitchFamily="18" charset="0"/>
+              </a:rPr>
+              <a:t>The responsibilities of scientists</a:t>
+            </a:r>
+          </a:p>
+          <a:p>
+            <a:pPr>
+              <a:lnSpc>
+                <a:spcPct val="120000"/>
+              </a:lnSpc>
+            </a:pPr>
+            <a:r>
+              <a:rPr lang="en-US" dirty="0">
+                <a:latin typeface="Times New Roman" panose="02020603050405020304" pitchFamily="18" charset="0"/>
+                <a:cs typeface="Times New Roman" panose="02020603050405020304" pitchFamily="18" charset="0"/>
+              </a:rPr>
+              <a:t>Conclusion</a:t>
+            </a:r>
+            <a:endParaRPr lang="ru-RU" dirty="0">
+              <a:latin typeface="Times New Roman" panose="02020603050405020304" pitchFamily="18" charset="0"/>
+              <a:cs typeface="Times New Roman" panose="02020603050405020304" pitchFamily="18" charset="0"/>
+            </a:endParaRPr>
+          </a:p>
+        </p:txBody>
+      </p:sp>
+    </p:spTree>
+    <p:extLst>
+      <p:ext uri="{BB962C8B-B14F-4D97-AF65-F5344CB8AC3E}">
+        <p14:creationId xmlns:p14="http://schemas.microsoft.com/office/powerpoint/2010/main" val="2982420855"/>
+      </p:ext>
+    </p:extLst>
+  </p:cSld>
+  <p:clrMapOvr>
+    <a:masterClrMapping/>
+  </p:clrMapOvr>
+</p:sld>
+</file>
+
+<file path=ppt/slides/slide3.xml><?xml version="1.0" encoding="utf-8"?>
+<p:sld xmlns:a="http://schemas.openxmlformats.org/drawingml/2006/main" xmlns:r="http://schemas.openxmlformats.org/officeDocument/2006/relationships" xmlns:p="http://schemas.openxmlformats.org/presentationml/2006/main">
+  <p:cSld>
+    <p:spTree>
+      <p:nvGrpSpPr>
+        <p:cNvPr id="1" name=""/>
+        <p:cNvGrpSpPr/>
+        <p:nvPr/>
+      </p:nvGrpSpPr>
+      <p:grpSpPr>
+        <a:xfrm>
+          <a:off x="0" y="0"/>
+          <a:ext cx="0" cy="0"/>
+          <a:chOff x="0" y="0"/>
+          <a:chExt cx="0" cy="0"/>
+        </a:xfrm>
+      </p:grpSpPr>
+      <p:sp>
+        <p:nvSpPr>
+          <p:cNvPr id="2" name="Заголовок 1">
+            <a:extLst>
+              <a:ext uri="{FF2B5EF4-FFF2-40B4-BE49-F238E27FC236}">
+                <a16:creationId xmlns:a16="http://schemas.microsoft.com/office/drawing/2014/main" id="{36638661-125B-4AD7-B4C5-E70A8DAEEB4C}"/>
+              </a:ext>
+            </a:extLst>
+          </p:cNvPr>
+          <p:cNvSpPr>
+            <a:spLocks noGrp="1"/>
+          </p:cNvSpPr>
+          <p:nvPr>
+            <p:ph type="title"/>
+          </p:nvPr>
+        </p:nvSpPr>
+        <p:spPr/>
+        <p:txBody>
+          <a:bodyPr/>
+          <a:lstStyle/>
+          <a:p>
+            <a:pPr algn="ctr"/>
+            <a:r>
+              <a:rPr lang="en-US" dirty="0">
+                <a:latin typeface="Times New Roman" panose="02020603050405020304" pitchFamily="18" charset="0"/>
+                <a:cs typeface="Times New Roman" panose="02020603050405020304" pitchFamily="18" charset="0"/>
+              </a:rPr>
               <a:t>Who are scientists and what do they do?</a:t>
             </a:r>
             <a:endParaRPr lang="ru-RU" dirty="0">
@@ -3552,6 +3728,7 @@
           </a:bodyPr>
           <a:lstStyle/>
           <a:p>
+            <a:pPr algn="ctr"/>
             <a:r>
               <a:rPr lang="en-US" sz="2000" dirty="0">
                 <a:latin typeface="Times New Roman" panose="02020603050405020304" pitchFamily="18" charset="0"/>
@@ -3579,7 +3756,7 @@
 </p:sld>
 </file>
 
-<file path=ppt/slides/slide3.xml><?xml version="1.0" encoding="utf-8"?>
+<file path=ppt/slides/slide4.xml><?xml version="1.0" encoding="utf-8"?>
 <p:sld xmlns:a="http://schemas.openxmlformats.org/drawingml/2006/main" xmlns:r="http://schemas.openxmlformats.org/officeDocument/2006/relationships" xmlns:p="http://schemas.openxmlformats.org/presentationml/2006/main">
   <p:cSld>
     <p:spTree>
@@ -3814,7 +3991,7 @@
 </p:sld>
 </file>
 
-<file path=ppt/slides/slide4.xml><?xml version="1.0" encoding="utf-8"?>
+<file path=ppt/slides/slide5.xml><?xml version="1.0" encoding="utf-8"?>
 <p:sld xmlns:a="http://schemas.openxmlformats.org/drawingml/2006/main" xmlns:r="http://schemas.openxmlformats.org/officeDocument/2006/relationships" xmlns:p="http://schemas.openxmlformats.org/presentationml/2006/main">
   <p:cSld>
     <p:spTree>
@@ -4106,7 +4283,7 @@
 </p:sld>
 </file>
 
-<file path=ppt/slides/slide5.xml><?xml version="1.0" encoding="utf-8"?>
+<file path=ppt/slides/slide6.xml><?xml version="1.0" encoding="utf-8"?>
 <p:sld xmlns:a="http://schemas.openxmlformats.org/drawingml/2006/main" xmlns:r="http://schemas.openxmlformats.org/officeDocument/2006/relationships" xmlns:p="http://schemas.openxmlformats.org/presentationml/2006/main">
   <p:cSld>
     <p:spTree>
@@ -4411,7 +4588,120 @@
 </p:sld>
 </file>
 
-<file path=ppt/slides/slide6.xml><?xml version="1.0" encoding="utf-8"?>
+<file path=ppt/slides/slide7.xml><?xml version="1.0" encoding="utf-8"?>
+<p:sld xmlns:a="http://schemas.openxmlformats.org/drawingml/2006/main" xmlns:r="http://schemas.openxmlformats.org/officeDocument/2006/relationships" xmlns:p="http://schemas.openxmlformats.org/presentationml/2006/main">
+  <p:cSld>
+    <p:spTree>
+      <p:nvGrpSpPr>
+        <p:cNvPr id="1" name=""/>
+        <p:cNvGrpSpPr/>
+        <p:nvPr/>
+      </p:nvGrpSpPr>
+      <p:grpSpPr>
+        <a:xfrm>
+          <a:off x="0" y="0"/>
+          <a:ext cx="0" cy="0"/>
+          <a:chOff x="0" y="0"/>
+          <a:chExt cx="0" cy="0"/>
+        </a:xfrm>
+      </p:grpSpPr>
+      <p:sp>
+        <p:nvSpPr>
+          <p:cNvPr id="2" name="Заголовок 1">
+            <a:extLst>
+              <a:ext uri="{FF2B5EF4-FFF2-40B4-BE49-F238E27FC236}">
+                <a16:creationId xmlns:a16="http://schemas.microsoft.com/office/drawing/2014/main" id="{36638661-125B-4AD7-B4C5-E70A8DAEEB4C}"/>
+              </a:ext>
+            </a:extLst>
+          </p:cNvPr>
+          <p:cNvSpPr>
+            <a:spLocks noGrp="1"/>
+          </p:cNvSpPr>
+          <p:nvPr>
+            <p:ph type="title"/>
+          </p:nvPr>
+        </p:nvSpPr>
+        <p:spPr/>
+        <p:txBody>
+          <a:bodyPr/>
+          <a:lstStyle/>
+          <a:p>
+            <a:pPr algn="ctr"/>
+            <a:r>
+              <a:rPr lang="en-US" dirty="0">
+                <a:latin typeface="Times New Roman" panose="02020603050405020304" pitchFamily="18" charset="0"/>
+                <a:cs typeface="Times New Roman" panose="02020603050405020304" pitchFamily="18" charset="0"/>
+              </a:rPr>
+              <a:t>Conclusion</a:t>
+            </a:r>
+            <a:endParaRPr lang="ru-RU" dirty="0">
+              <a:latin typeface="Times New Roman" panose="02020603050405020304" pitchFamily="18" charset="0"/>
+              <a:cs typeface="Times New Roman" panose="02020603050405020304" pitchFamily="18" charset="0"/>
+            </a:endParaRPr>
+          </a:p>
+        </p:txBody>
+      </p:sp>
+      <p:pic>
+        <p:nvPicPr>
+          <p:cNvPr id="1026" name="Picture 2" descr="80+ Collections Of Scientist Physicist Stock Photos, Pictures &amp;  Royalty-Free Images - iStock">
+            <a:extLst>
+              <a:ext uri="{FF2B5EF4-FFF2-40B4-BE49-F238E27FC236}">
+                <a16:creationId xmlns:a16="http://schemas.microsoft.com/office/drawing/2014/main" id="{F6E5DDE1-7D20-45F3-96E9-81C8D88986AA}"/>
+              </a:ext>
+            </a:extLst>
+          </p:cNvPr>
+          <p:cNvPicPr>
+            <a:picLocks noChangeAspect="1" noChangeArrowheads="1"/>
+          </p:cNvPicPr>
+          <p:nvPr/>
+        </p:nvPicPr>
+        <p:blipFill>
+          <a:blip r:embed="rId2">
+            <a:extLst>
+              <a:ext uri="{28A0092B-C50C-407E-A947-70E740481C1C}">
+                <a14:useLocalDpi xmlns:a14="http://schemas.microsoft.com/office/drawing/2010/main" val="0"/>
+              </a:ext>
+            </a:extLst>
+          </a:blip>
+          <a:srcRect/>
+          <a:stretch>
+            <a:fillRect/>
+          </a:stretch>
+        </p:blipFill>
+        <p:spPr bwMode="auto">
+          <a:xfrm>
+            <a:off x="2645798" y="1690688"/>
+            <a:ext cx="6900403" cy="5040000"/>
+          </a:xfrm>
+          <a:prstGeom prst="rect">
+            <a:avLst/>
+          </a:prstGeom>
+          <a:noFill/>
+          <a:extLst>
+            <a:ext uri="{909E8E84-426E-40DD-AFC4-6F175D3DCCD1}">
+              <a14:hiddenFill xmlns:a14="http://schemas.microsoft.com/office/drawing/2010/main">
+                <a:solidFill>
+                  <a:srgbClr val="FFFFFF"/>
+                </a:solidFill>
+              </a14:hiddenFill>
+            </a:ext>
+          </a:extLst>
+        </p:spPr>
+      </p:pic>
+    </p:spTree>
+    <p:extLst>
+      <p:ext uri="{BB962C8B-B14F-4D97-AF65-F5344CB8AC3E}">
+        <p14:creationId xmlns:p14="http://schemas.microsoft.com/office/powerpoint/2010/main" val="449546508"/>
+      </p:ext>
+    </p:extLst>
+  </p:cSld>
+  <p:clrMapOvr>
+    <a:masterClrMapping/>
+  </p:clrMapOvr>
+</p:sld>
+</file>
+
+<file path=ppt/slides/slide8.xml><?xml version="1.0" encoding="utf-8"?>
 <p:sld xmlns:a="http://schemas.openxmlformats.org/drawingml/2006/main" xmlns:r="http://schemas.openxmlformats.org/officeDocument/2006/relationships" xmlns:p="http://schemas.openxmlformats.org/presentationml/2006/main">
   <p:cSld>
     <p:spTree>

--- a/Novosibirsk_State_University/Английский язык/7 семестр/Homework/Scientists role in society.pptx
+++ b/Novosibirsk_State_University/Английский язык/7 семестр/Homework/Scientists role in society.pptx
@@ -266,7 +266,7 @@
           <a:p>
             <a:fld id="{E8964C5B-A5E9-44B5-A532-59FAEF801C7A}" type="datetimeFigureOut">
               <a:rPr lang="ru-RU" smtClean="0"/>
-              <a:t>19.12.2025</a:t>
+              <a:t>21.12.2025</a:t>
             </a:fld>
             <a:endParaRPr lang="ru-RU"/>
           </a:p>
@@ -464,7 +464,7 @@
           <a:p>
             <a:fld id="{E8964C5B-A5E9-44B5-A532-59FAEF801C7A}" type="datetimeFigureOut">
               <a:rPr lang="ru-RU" smtClean="0"/>
-              <a:t>19.12.2025</a:t>
+              <a:t>21.12.2025</a:t>
             </a:fld>
             <a:endParaRPr lang="ru-RU"/>
           </a:p>
@@ -672,7 +672,7 @@
           <a:p>
             <a:fld id="{E8964C5B-A5E9-44B5-A532-59FAEF801C7A}" type="datetimeFigureOut">
               <a:rPr lang="ru-RU" smtClean="0"/>
-              <a:t>19.12.2025</a:t>
+              <a:t>21.12.2025</a:t>
             </a:fld>
             <a:endParaRPr lang="ru-RU"/>
           </a:p>
@@ -870,7 +870,7 @@
           <a:p>
             <a:fld id="{E8964C5B-A5E9-44B5-A532-59FAEF801C7A}" type="datetimeFigureOut">
               <a:rPr lang="ru-RU" smtClean="0"/>
-              <a:t>19.12.2025</a:t>
+              <a:t>21.12.2025</a:t>
             </a:fld>
             <a:endParaRPr lang="ru-RU"/>
           </a:p>
@@ -1145,7 +1145,7 @@
           <a:p>
             <a:fld id="{E8964C5B-A5E9-44B5-A532-59FAEF801C7A}" type="datetimeFigureOut">
               <a:rPr lang="ru-RU" smtClean="0"/>
-              <a:t>19.12.2025</a:t>
+              <a:t>21.12.2025</a:t>
             </a:fld>
             <a:endParaRPr lang="ru-RU"/>
           </a:p>
@@ -1410,7 +1410,7 @@
           <a:p>
             <a:fld id="{E8964C5B-A5E9-44B5-A532-59FAEF801C7A}" type="datetimeFigureOut">
               <a:rPr lang="ru-RU" smtClean="0"/>
-              <a:t>19.12.2025</a:t>
+              <a:t>21.12.2025</a:t>
             </a:fld>
             <a:endParaRPr lang="ru-RU"/>
           </a:p>
@@ -1822,7 +1822,7 @@
           <a:p>
             <a:fld id="{E8964C5B-A5E9-44B5-A532-59FAEF801C7A}" type="datetimeFigureOut">
               <a:rPr lang="ru-RU" smtClean="0"/>
-              <a:t>19.12.2025</a:t>
+              <a:t>21.12.2025</a:t>
             </a:fld>
             <a:endParaRPr lang="ru-RU"/>
           </a:p>
@@ -1963,7 +1963,7 @@
           <a:p>
             <a:fld id="{E8964C5B-A5E9-44B5-A532-59FAEF801C7A}" type="datetimeFigureOut">
               <a:rPr lang="ru-RU" smtClean="0"/>
-              <a:t>19.12.2025</a:t>
+              <a:t>21.12.2025</a:t>
             </a:fld>
             <a:endParaRPr lang="ru-RU"/>
           </a:p>
@@ -2076,7 +2076,7 @@
           <a:p>
             <a:fld id="{E8964C5B-A5E9-44B5-A532-59FAEF801C7A}" type="datetimeFigureOut">
               <a:rPr lang="ru-RU" smtClean="0"/>
-              <a:t>19.12.2025</a:t>
+              <a:t>21.12.2025</a:t>
             </a:fld>
             <a:endParaRPr lang="ru-RU"/>
           </a:p>
@@ -2387,7 +2387,7 @@
           <a:p>
             <a:fld id="{E8964C5B-A5E9-44B5-A532-59FAEF801C7A}" type="datetimeFigureOut">
               <a:rPr lang="ru-RU" smtClean="0"/>
-              <a:t>19.12.2025</a:t>
+              <a:t>21.12.2025</a:t>
             </a:fld>
             <a:endParaRPr lang="ru-RU"/>
           </a:p>
@@ -2675,7 +2675,7 @@
           <a:p>
             <a:fld id="{E8964C5B-A5E9-44B5-A532-59FAEF801C7A}" type="datetimeFigureOut">
               <a:rPr lang="ru-RU" smtClean="0"/>
-              <a:t>19.12.2025</a:t>
+              <a:t>21.12.2025</a:t>
             </a:fld>
             <a:endParaRPr lang="ru-RU"/>
           </a:p>
@@ -2916,7 +2916,7 @@
           <a:p>
             <a:fld id="{E8964C5B-A5E9-44B5-A532-59FAEF801C7A}" type="datetimeFigureOut">
               <a:rPr lang="ru-RU" smtClean="0"/>
-              <a:t>19.12.2025</a:t>
+              <a:t>21.12.2025</a:t>
             </a:fld>
             <a:endParaRPr lang="ru-RU"/>
           </a:p>
@@ -3504,8 +3504,8 @@
         </p:nvSpPr>
         <p:spPr>
           <a:xfrm>
-            <a:off x="3603812" y="2017058"/>
-            <a:ext cx="4984376" cy="4168869"/>
+            <a:off x="2989729" y="1963270"/>
+            <a:ext cx="6212541" cy="4168869"/>
           </a:xfrm>
         </p:spPr>
         <p:txBody>
@@ -3516,7 +3516,7 @@
           <a:p>
             <a:pPr>
               <a:lnSpc>
-                <a:spcPct val="120000"/>
+                <a:spcPct val="150000"/>
               </a:lnSpc>
             </a:pPr>
             <a:r>
@@ -3530,7 +3530,7 @@
           <a:p>
             <a:pPr>
               <a:lnSpc>
-                <a:spcPct val="120000"/>
+                <a:spcPct val="150000"/>
               </a:lnSpc>
             </a:pPr>
             <a:r>
@@ -3544,7 +3544,7 @@
           <a:p>
             <a:pPr>
               <a:lnSpc>
-                <a:spcPct val="120000"/>
+                <a:spcPct val="150000"/>
               </a:lnSpc>
             </a:pPr>
             <a:r>
@@ -3558,7 +3558,7 @@
           <a:p>
             <a:pPr>
               <a:lnSpc>
-                <a:spcPct val="120000"/>
+                <a:spcPct val="150000"/>
               </a:lnSpc>
             </a:pPr>
             <a:r>
@@ -3572,7 +3572,7 @@
           <a:p>
             <a:pPr>
               <a:lnSpc>
-                <a:spcPct val="120000"/>
+                <a:spcPct val="150000"/>
               </a:lnSpc>
             </a:pPr>
             <a:r>
